--- a/workspace/clients/brisken/deliverables/lead-generation/rome-2026/decks/brisken-smart-trading.pptx
+++ b/workspace/clients/brisken/deliverables/lead-generation/rome-2026/decks/brisken-smart-trading.pptx
@@ -11675,7 +11675,7 @@
                 <a:ea typeface="Segoe UI" pitchFamily="34" charset="-122"/>
                 <a:cs typeface="Segoe UI" pitchFamily="34" charset="-120"/>
               </a:rPr>
-              <a:t>No code to run it. Your team keeps it in step with how you trade. Evonik and RWZ already build on the platform.</a:t>
+              <a:t>No code to run it. Your team keeps it in step with how you trade. Customer teams already build on the platform.</a:t>
             </a:r>
             <a:endParaRPr lang="en-US" sz="1300" dirty="0"/>
           </a:p>
